--- a/public/fun/cards/teacher/명함_선생님_04_버건디.pptx
+++ b/public/fun/cards/teacher/명함_선생님_04_버건디.pptx
@@ -3210,7 +3210,7 @@
                 <a:latin typeface="맑은 고딕"/>
                 <a:ea typeface="맑은 고딕"/>
               </a:rPr>
-              <a:t>안녕하세요!</a:t>
+              <a:t>한 줄 소개</a:t>
             </a:r>
           </a:p>
         </p:txBody>
